--- a/Topic_E/Exam_Practice/TE-L08_Writing_Workshop_Travel_Cultural_Exchange_and_Understanding.pptx
+++ b/Topic_E/Exam_Practice/TE-L08_Writing_Workshop_Travel_Cultural_Exchange_and_Understanding.pptx
@@ -784,7 +784,11 @@
           <a:lstStyle/>
           <a:p>
             <a:r>
-              <a:rPr lang="en-US" dirty="0"/>
+              <a:rPr lang="ar-SA" dirty="0">
+                <a:latin typeface="Amiri" pitchFamily="2" charset="-78"/>
+                <a:ea typeface="Amiri" pitchFamily="2" charset="-78"/>
+                <a:cs typeface="Amiri" pitchFamily="2" charset="-78"/>
+              </a:rPr>
               <a:t>Q3 (3 min to choose and read). Title (أ) suits Core and Develop; title (ب) suits Stretch.</a:t>
             </a:r>
             <a:endParaRPr lang="en-US" dirty="0"/>
@@ -1403,7 +1407,11 @@
           <a:lstStyle/>
           <a:p>
             <a:r>
-              <a:rPr lang="en-US" dirty="0"/>
+              <a:rPr lang="ar-SA" dirty="0">
+                <a:latin typeface="Amiri" pitchFamily="2" charset="-78"/>
+                <a:ea typeface="Amiri" pitchFamily="2" charset="-78"/>
+                <a:cs typeface="Amiri" pitchFamily="2" charset="-78"/>
+              </a:rPr>
               <a:t>WELCOME (1 min) — while students join.
 • Greet each student by name as they arrive: السَّلَامُ عَلَيْكُمْ. Take the register (Pastoral Tracker: attendance 0/1).
 • 2-MINUTE CHECK-IN (SEND training): a private chat to any student who seemed unsettled last lesson — “Are you okay today? 👍 / 👎”.
@@ -1672,7 +1680,11 @@
           <a:lstStyle/>
           <a:p>
             <a:r>
-              <a:rPr lang="en-US" dirty="0"/>
+              <a:rPr lang="ar-SA" dirty="0">
+                <a:latin typeface="Amiri" pitchFamily="2" charset="-78"/>
+                <a:ea typeface="Amiri" pitchFamily="2" charset="-78"/>
+                <a:cs typeface="Amiri" pitchFamily="2" charset="-78"/>
+              </a:rPr>
               <a:t>QUESTION 1 — FORM FILLING. About 8 minutes. Core: boxes 1–6. Develop / Stretch: all 8. Headings are feminine (tatawaqqaʿīnahā, turīdīna) — a boy reads تَتَوَقَّعُهَا · تُرِيدُ. Box 6 combines a country and a time phrase.</a:t>
             </a:r>
             <a:endParaRPr lang="en-US" dirty="0"/>
@@ -1936,7 +1948,11 @@
           <a:lstStyle/>
           <a:p>
             <a:r>
-              <a:rPr lang="en-US" dirty="0"/>
+              <a:rPr lang="ar-SA" dirty="0">
+                <a:latin typeface="Amiri" pitchFamily="2" charset="-78"/>
+                <a:ea typeface="Amiri" pitchFamily="2" charset="-78"/>
+                <a:cs typeface="Amiri" pitchFamily="2" charset="-78"/>
+              </a:rPr>
               <a:t>Question words: عِنْدَ مَنْ (with whom) · فَعَلْتِ (you did — PAST) · لِمَاذَا (why → لِأَنَّ / بِسَبَبِ) · خِطَطُكِ (plans — FUTURE).</a:t>
             </a:r>
             <a:endParaRPr lang="en-US" dirty="0"/>
@@ -2508,6 +2524,7 @@
                   <a:srgbClr val="D4AF37"/>
                 </a:solidFill>
                 <a:latin typeface="Amiri" pitchFamily="2" charset="-78"/>
+                <a:ea typeface="Amiri" pitchFamily="2" charset="-78"/>
                 <a:cs typeface="Amiri" pitchFamily="2" charset="-78"/>
               </a:rPr>
               <a:t>م</a:t>
@@ -2714,6 +2731,7 @@
                   <a:srgbClr val="D4AF37"/>
                 </a:solidFill>
                 <a:latin typeface="Amiri" pitchFamily="2" charset="-78"/>
+                <a:ea typeface="Amiri" pitchFamily="2" charset="-78"/>
                 <a:cs typeface="Amiri" pitchFamily="2" charset="-78"/>
               </a:rPr>
               <a:t>وَرْشَةُ الكِتَابَةِ — السَّفَرُ وَالتَّبَادُلُ الثَّقَافِيُّ</a:t>
@@ -3171,6 +3189,7 @@
                   <a:srgbClr val="D4AF37"/>
                 </a:solidFill>
                 <a:latin typeface="Amiri" pitchFamily="2" charset="-78"/>
+                <a:ea typeface="Amiri" pitchFamily="2" charset="-78"/>
                 <a:cs typeface="Amiri" pitchFamily="2" charset="-78"/>
               </a:rPr>
               <a:t>م</a:t>
@@ -3491,6 +3510,7 @@
                   <a:srgbClr val="8A6D1E"/>
                 </a:solidFill>
                 <a:latin typeface="Amiri" pitchFamily="2" charset="-78"/>
+                <a:ea typeface="Amiri" pitchFamily="2" charset="-78"/>
                 <a:cs typeface="Amiri" pitchFamily="2" charset="-78"/>
               </a:rPr>
               <a:t>نَمُوذَجُ الإِجَابَةِ</a:t>
@@ -3604,6 +3624,7 @@
                   <a:srgbClr val="1F2A37"/>
                 </a:solidFill>
                 <a:latin typeface="Amiri" pitchFamily="2" charset="-78"/>
+                <a:ea typeface="Amiri" pitchFamily="2" charset="-78"/>
                 <a:cs typeface="Amiri" pitchFamily="2" charset="-78"/>
               </a:rPr>
               <a:t>مَرْحَبًا يَا سَارَةُ،</a:t>
@@ -3623,6 +3644,7 @@
                   <a:srgbClr val="1F2A37"/>
                 </a:solidFill>
                 <a:latin typeface="Amiri" pitchFamily="2" charset="-78"/>
+                <a:ea typeface="Amiri" pitchFamily="2" charset="-78"/>
                 <a:cs typeface="Amiri" pitchFamily="2" charset="-78"/>
               </a:rPr>
               <a:t>كَيْفَ حَالُكِ؟ أَنَا الآنَ فِي مَدِينَةِ فَاسَ فِي المَغْرِبِ، فِي بَرْنَامَجِ تَبَادُلٍ ثَقَافِيٍّ. أُقِيمُ عِنْدَ عَائِلَةٍ مَغْرِبِيَّةٍ لَطِيفَةٍ، وَعِنْدَهُمْ بِنْتٌ فِي عُمْرِي اسْمُهَا سُكَيْنَةُ. فِي الأُسْبُوعِ الأَوَّلِ زُرْتُ المَدِينَةَ القَدِيمَةَ، وَذَهَبْتُ إِلَى المَدْرَسَةِ مَعَ سُكَيْنَةَ. لَاحَظْتُ أَنَّ النَّاسَ يَتَعَشَّوْنَ مُتَأَخِّرِينَ، لِأَنَّ الجَوَّ حَارٌّ فِي النَّهَارِ. فِي البِدَايَةِ كُنْتُ جَائِعَةً، لِذٰلِكَ آكُلُ وَجْبَةً صَغِيرَةً فِي العَصْرِ الآنَ! أَنَا سَعِيدَةٌ جِدًّا هُنَا. فِي الأُسْبُوعِ القَادِمِ سَنُسَافِرُ إِلَى الصَّحْرَاءِ. وَأَنْتِ، هَلْ تُرِيدِينَ أَنْ تُشَارِكِي فِي التَّبَادُلِ؟</a:t>
@@ -3642,6 +3664,7 @@
                   <a:srgbClr val="1F2A37"/>
                 </a:solidFill>
                 <a:latin typeface="Amiri" pitchFamily="2" charset="-78"/>
+                <a:ea typeface="Amiri" pitchFamily="2" charset="-78"/>
                 <a:cs typeface="Amiri" pitchFamily="2" charset="-78"/>
               </a:rPr>
               <a:t>مَعَ السَّلَامَةِ،</a:t>
@@ -3661,6 +3684,7 @@
                   <a:srgbClr val="1F2A37"/>
                 </a:solidFill>
                 <a:latin typeface="Amiri" pitchFamily="2" charset="-78"/>
+                <a:ea typeface="Amiri" pitchFamily="2" charset="-78"/>
                 <a:cs typeface="Amiri" pitchFamily="2" charset="-78"/>
               </a:rPr>
               <a:t>لَيْلَى</a:t>
@@ -3824,11 +3848,12 @@
               <a:buNone/>
             </a:pPr>
             <a:r>
-              <a:rPr lang="en-US" sz="950" b="1" dirty="0">
+              <a:rPr lang="ar-SA" sz="950" b="1" dirty="0">
                 <a:solidFill>
                   <a:srgbClr val="FFFFFF"/>
                 </a:solidFill>
                 <a:latin typeface="Calibri" pitchFamily="34" charset="0"/>
+                <a:ea typeface="Amiri" pitchFamily="2" charset="-78"/>
                 <a:cs typeface="Amiri" pitchFamily="2" charset="-78"/>
               </a:rPr>
               <a:t>أُقِيمُ عِنْدَ</a:t>
@@ -3889,11 +3914,12 @@
               <a:buNone/>
             </a:pPr>
             <a:r>
-              <a:rPr lang="en-US" sz="950" b="1" dirty="0">
+              <a:rPr lang="ar-SA" sz="950" b="1" dirty="0">
                 <a:solidFill>
                   <a:srgbClr val="FFFFFF"/>
                 </a:solidFill>
                 <a:latin typeface="Calibri" pitchFamily="34" charset="0"/>
+                <a:ea typeface="Amiri" pitchFamily="2" charset="-78"/>
                 <a:cs typeface="Amiri" pitchFamily="2" charset="-78"/>
               </a:rPr>
               <a:t>زُرْتُ المَدِينَةَ</a:t>
@@ -3954,11 +3980,12 @@
               <a:buNone/>
             </a:pPr>
             <a:r>
-              <a:rPr lang="en-US" sz="950" b="1" dirty="0">
+              <a:rPr lang="ar-SA" sz="950" b="1" dirty="0">
                 <a:solidFill>
                   <a:srgbClr val="FFFFFF"/>
                 </a:solidFill>
                 <a:latin typeface="Calibri" pitchFamily="34" charset="0"/>
+                <a:ea typeface="Amiri" pitchFamily="2" charset="-78"/>
                 <a:cs typeface="Amiri" pitchFamily="2" charset="-78"/>
               </a:rPr>
               <a:t>لِأَنَّ الجَوَّ حَارٌّ</a:t>
@@ -4019,11 +4046,12 @@
               <a:buNone/>
             </a:pPr>
             <a:r>
-              <a:rPr lang="en-US" sz="950" b="1" dirty="0">
+              <a:rPr lang="ar-SA" sz="950" b="1" dirty="0">
                 <a:solidFill>
                   <a:srgbClr val="FFFFFF"/>
                 </a:solidFill>
                 <a:latin typeface="Calibri" pitchFamily="34" charset="0"/>
+                <a:ea typeface="Amiri" pitchFamily="2" charset="-78"/>
                 <a:cs typeface="Amiri" pitchFamily="2" charset="-78"/>
               </a:rPr>
               <a:t>لِذٰلِكَ آكُلُ</a:t>
@@ -4157,6 +4185,7 @@
                   <a:srgbClr val="D4AF37"/>
                 </a:solidFill>
                 <a:latin typeface="Amiri" pitchFamily="2" charset="-78"/>
+                <a:ea typeface="Amiri" pitchFamily="2" charset="-78"/>
                 <a:cs typeface="Amiri" pitchFamily="2" charset="-78"/>
               </a:rPr>
               <a:t>م</a:t>
@@ -4477,6 +4506,7 @@
                   <a:srgbClr val="8A6D1E"/>
                 </a:solidFill>
                 <a:latin typeface="Amiri" pitchFamily="2" charset="-78"/>
+                <a:ea typeface="Amiri" pitchFamily="2" charset="-78"/>
                 <a:cs typeface="Amiri" pitchFamily="2" charset="-78"/>
               </a:rPr>
               <a:t>نَمُوذَجُ الإِجَابَةِ</a:t>
@@ -4590,6 +4620,7 @@
                   <a:srgbClr val="1F2A37"/>
                 </a:solidFill>
                 <a:latin typeface="Amiri" pitchFamily="2" charset="-78"/>
+                <a:ea typeface="Amiri" pitchFamily="2" charset="-78"/>
                 <a:cs typeface="Amiri" pitchFamily="2" charset="-78"/>
               </a:rPr>
               <a:t>عَزِيزَتِي سَارَةُ،</a:t>
@@ -4609,6 +4640,7 @@
                   <a:srgbClr val="1F2A37"/>
                 </a:solidFill>
                 <a:latin typeface="Amiri" pitchFamily="2" charset="-78"/>
+                <a:ea typeface="Amiri" pitchFamily="2" charset="-78"/>
                 <a:cs typeface="Amiri" pitchFamily="2" charset="-78"/>
               </a:rPr>
               <a:t>مَضَى أُسْبُوعِيَ الأَوَّلُ فِي فَاسَ أَسْرَعَ مِمَّا تَوَقَّعْتُ! أُقِيمُ عِنْدَ عَائِلَةٍ مَغْرِبِيَّةٍ كَرِيمَةٍ، وَابْنَتُهُمْ سُكَيْنَةُ تُرَافِقُنِي إِلَى المَدْرَسَةِ كُلَّ صَبَاحٍ، وَتُعَلِّمُنِي كَلِمَاتٍ مِنَ الدَّارِجَةِ لَا تُوجَدُ فِي كُتُبِنَا. وَقَدْ أَدْهَشَتْنِي المَدِينَةُ القَدِيمَةُ بِأَزِقَّتِهَا الضَّيِّقَةِ الَّتِي لَا تَدْخُلُهَا السَّيَّارَاتُ، مِمَّا جَعَلَنِي أَضِيعُ فِيهَا مَرَّتَيْنِ! أَمَّا أَكْبَرُ اخْتِلَافٍ لَاحَظْتُهُ فَهُوَ مَوْعِدُ العَشَاءِ؛ إِذْ يَتَأَخَّرُ إِلَى العَاشِرَةِ بِسَبَبِ حَرَارَةِ النَّهَارِ. صَحِيحٌ أَنَّنِي تَعِبْتُ فِي البِدَايَةِ، غَيْرَ أَنَّنِي صِرْتُ أُحِبُّ هٰذِهِ السَّهَرَاتِ العَائِلِيَّةَ. وَإِذَا سَارَ كُلُّ شَيْءٍ كَمَا خُطِّطَ لَهُ، فَسَنَقْضِي لَيْلَةً فِي الصَّحْرَاءِ الأُسْبُوعَ القَادِمَ. مَتَى سَتُشَارِكِينَ أَنْتِ فِي تَبَادُلٍ كَهٰذَا؟</a:t>
@@ -4628,6 +4660,7 @@
                   <a:srgbClr val="1F2A37"/>
                 </a:solidFill>
                 <a:latin typeface="Amiri" pitchFamily="2" charset="-78"/>
+                <a:ea typeface="Amiri" pitchFamily="2" charset="-78"/>
                 <a:cs typeface="Amiri" pitchFamily="2" charset="-78"/>
               </a:rPr>
               <a:t>بِمَحَبَّةٍ،</a:t>
@@ -4647,6 +4680,7 @@
                   <a:srgbClr val="1F2A37"/>
                 </a:solidFill>
                 <a:latin typeface="Amiri" pitchFamily="2" charset="-78"/>
+                <a:ea typeface="Amiri" pitchFamily="2" charset="-78"/>
                 <a:cs typeface="Amiri" pitchFamily="2" charset="-78"/>
               </a:rPr>
               <a:t>لَيْلَى</a:t>
@@ -4810,11 +4844,12 @@
               <a:buNone/>
             </a:pPr>
             <a:r>
-              <a:rPr lang="en-US" sz="950" b="1" dirty="0">
+              <a:rPr lang="ar-SA" sz="950" b="1" dirty="0">
                 <a:solidFill>
                   <a:srgbClr val="FFFFFF"/>
                 </a:solidFill>
                 <a:latin typeface="Calibri" pitchFamily="34" charset="0"/>
+                <a:ea typeface="Amiri" pitchFamily="2" charset="-78"/>
                 <a:cs typeface="Amiri" pitchFamily="2" charset="-78"/>
               </a:rPr>
               <a:t>أَسْرَعَ مِمَّا تَوَقَّعْتُ</a:t>
@@ -4875,11 +4910,12 @@
               <a:buNone/>
             </a:pPr>
             <a:r>
-              <a:rPr lang="en-US" sz="950" b="1" dirty="0">
+              <a:rPr lang="ar-SA" sz="950" b="1" dirty="0">
                 <a:solidFill>
                   <a:srgbClr val="FFFFFF"/>
                 </a:solidFill>
                 <a:latin typeface="Calibri" pitchFamily="34" charset="0"/>
+                <a:ea typeface="Amiri" pitchFamily="2" charset="-78"/>
                 <a:cs typeface="Amiri" pitchFamily="2" charset="-78"/>
               </a:rPr>
               <a:t>مِمَّا جَعَلَنِي</a:t>
@@ -4940,11 +4976,12 @@
               <a:buNone/>
             </a:pPr>
             <a:r>
-              <a:rPr lang="en-US" sz="950" b="1" dirty="0">
+              <a:rPr lang="ar-SA" sz="950" b="1" dirty="0">
                 <a:solidFill>
                   <a:srgbClr val="FFFFFF"/>
                 </a:solidFill>
                 <a:latin typeface="Calibri" pitchFamily="34" charset="0"/>
+                <a:ea typeface="Amiri" pitchFamily="2" charset="-78"/>
                 <a:cs typeface="Amiri" pitchFamily="2" charset="-78"/>
               </a:rPr>
               <a:t>بِسَبَبِ حَرَارَةِ النَّهَارِ</a:t>
@@ -5005,11 +5042,12 @@
               <a:buNone/>
             </a:pPr>
             <a:r>
-              <a:rPr lang="en-US" sz="950" b="1" dirty="0">
+              <a:rPr lang="ar-SA" sz="950" b="1" dirty="0">
                 <a:solidFill>
                   <a:srgbClr val="FFFFFF"/>
                 </a:solidFill>
                 <a:latin typeface="Calibri" pitchFamily="34" charset="0"/>
+                <a:ea typeface="Amiri" pitchFamily="2" charset="-78"/>
                 <a:cs typeface="Amiri" pitchFamily="2" charset="-78"/>
               </a:rPr>
               <a:t>إِذَا سَارَ … فَسَنَقْضِي</a:t>
@@ -5143,6 +5181,7 @@
                   <a:srgbClr val="D4AF37"/>
                 </a:solidFill>
                 <a:latin typeface="Amiri" pitchFamily="2" charset="-78"/>
+                <a:ea typeface="Amiri" pitchFamily="2" charset="-78"/>
                 <a:cs typeface="Amiri" pitchFamily="2" charset="-78"/>
               </a:rPr>
               <a:t>م</a:t>
@@ -5463,6 +5502,7 @@
                   <a:srgbClr val="8A6D1E"/>
                 </a:solidFill>
                 <a:latin typeface="Amiri" pitchFamily="2" charset="-78"/>
+                <a:ea typeface="Amiri" pitchFamily="2" charset="-78"/>
                 <a:cs typeface="Amiri" pitchFamily="2" charset="-78"/>
               </a:rPr>
               <a:t>اخْتَرْ عُنْوَانًا وَاحِدًا</a:t>
@@ -5743,6 +5783,7 @@
                   <a:srgbClr val="1B3B6F"/>
                 </a:solidFill>
                 <a:latin typeface="Amiri" pitchFamily="2" charset="-78"/>
+                <a:ea typeface="Amiri" pitchFamily="2" charset="-78"/>
                 <a:cs typeface="Amiri" pitchFamily="2" charset="-78"/>
               </a:rPr>
               <a:t>رِحْلَةٌ غَيَّرَتْ نَظْرَتِي</a:t>
@@ -5781,6 +5822,7 @@
                   <a:srgbClr val="1B3B6F"/>
                 </a:solidFill>
                 <a:latin typeface="Amiri" pitchFamily="2" charset="-78"/>
+                <a:ea typeface="Amiri" pitchFamily="2" charset="-78"/>
                 <a:cs typeface="Amiri" pitchFamily="2" charset="-78"/>
               </a:rPr>
               <a:t>(أ)</a:t>
@@ -5887,6 +5929,7 @@
                   <a:srgbClr val="1B3B6F"/>
                 </a:solidFill>
                 <a:latin typeface="Amiri" pitchFamily="2" charset="-78"/>
+                <a:ea typeface="Amiri" pitchFamily="2" charset="-78"/>
                 <a:cs typeface="Amiri" pitchFamily="2" charset="-78"/>
               </a:rPr>
               <a:t>أَيْنَ ذَهَبْتَ وَكَيْفَ · حَيَاتُكَ هُنَاكَ · اخْتِلَافَاتٌ لَاحَظْتَهَا وَأَسْبَابُهَا · كَيْفَ تَغَيَّرْتَ وَخُطَطُكَ</a:t>
@@ -6018,6 +6061,7 @@
                   <a:srgbClr val="1B3B6F"/>
                 </a:solidFill>
                 <a:latin typeface="Amiri" pitchFamily="2" charset="-78"/>
+                <a:ea typeface="Amiri" pitchFamily="2" charset="-78"/>
                 <a:cs typeface="Amiri" pitchFamily="2" charset="-78"/>
               </a:rPr>
               <a:t>هَلْ يُسَاعِدُ السَّفَرُ عَلَى فَهْمِ الشُّعُوبِ الأُخْرَى؟</a:t>
@@ -6056,6 +6100,7 @@
                   <a:srgbClr val="1B3B6F"/>
                 </a:solidFill>
                 <a:latin typeface="Amiri" pitchFamily="2" charset="-78"/>
+                <a:ea typeface="Amiri" pitchFamily="2" charset="-78"/>
                 <a:cs typeface="Amiri" pitchFamily="2" charset="-78"/>
               </a:rPr>
               <a:t>(ب)</a:t>
@@ -6159,6 +6204,7 @@
                   <a:srgbClr val="1B3B6F"/>
                 </a:solidFill>
                 <a:latin typeface="Amiri" pitchFamily="2" charset="-78"/>
+                <a:ea typeface="Amiri" pitchFamily="2" charset="-78"/>
                 <a:cs typeface="Amiri" pitchFamily="2" charset="-78"/>
               </a:rPr>
               <a:t>المَوْضُوعُ · السَّائِحُ وَالمُسَافِرُ الحَقِيقِيُّ · مِثَالٌ مِنْ تَجْرِبَتِكَ · رَأْيُكَ</a:t>
@@ -6358,6 +6404,7 @@
                   <a:srgbClr val="D4AF37"/>
                 </a:solidFill>
                 <a:latin typeface="Amiri" pitchFamily="2" charset="-78"/>
+                <a:ea typeface="Amiri" pitchFamily="2" charset="-78"/>
                 <a:cs typeface="Amiri" pitchFamily="2" charset="-78"/>
               </a:rPr>
               <a:t>م</a:t>
@@ -6678,6 +6725,7 @@
                   <a:srgbClr val="8A6D1E"/>
                 </a:solidFill>
                 <a:latin typeface="Amiri" pitchFamily="2" charset="-78"/>
+                <a:ea typeface="Amiri" pitchFamily="2" charset="-78"/>
                 <a:cs typeface="Amiri" pitchFamily="2" charset="-78"/>
               </a:rPr>
               <a:t>خُطَّةُ الكِتَابَةِ</a:t>
@@ -7302,6 +7350,7 @@
                   <a:srgbClr val="1B3B6F"/>
                 </a:solidFill>
                 <a:latin typeface="Amiri" pitchFamily="2" charset="-78"/>
+                <a:ea typeface="Amiri" pitchFamily="2" charset="-78"/>
                 <a:cs typeface="Amiri" pitchFamily="2" charset="-78"/>
               </a:rPr>
               <a:t>كُنْتُ أَسْتَيْقِظُ فِي السَّابِعَةِ.</a:t>
@@ -7401,6 +7450,7 @@
                   <a:srgbClr val="1B3B6F"/>
                 </a:solidFill>
                 <a:latin typeface="Amiri" pitchFamily="2" charset="-78"/>
+                <a:ea typeface="Amiri" pitchFamily="2" charset="-78"/>
                 <a:cs typeface="Amiri" pitchFamily="2" charset="-78"/>
               </a:rPr>
               <a:t>يَتَعَشَّوْنَ مُتَأَخِّرِينَ بِسَبَبِ الحَرِّ.</a:t>
@@ -7500,6 +7550,7 @@
                   <a:srgbClr val="1B3B6F"/>
                 </a:solidFill>
                 <a:latin typeface="Amiri" pitchFamily="2" charset="-78"/>
+                <a:ea typeface="Amiri" pitchFamily="2" charset="-78"/>
                 <a:cs typeface="Amiri" pitchFamily="2" charset="-78"/>
               </a:rPr>
               <a:t>آمُلُ أَنْ تَزُورَنِي سُكَيْنَةُ فِي لَنْدَنَ.</a:t>
@@ -7661,6 +7712,7 @@
                   <a:srgbClr val="1F2A37"/>
                 </a:solidFill>
                 <a:latin typeface="Amiri" pitchFamily="2" charset="-78"/>
+                <a:ea typeface="Amiri" pitchFamily="2" charset="-78"/>
                 <a:cs typeface="Amiri" pitchFamily="2" charset="-78"/>
               </a:rPr>
               <a:t>أ</a:t>
@@ -7687,6 +7739,7 @@
                   <a:srgbClr val="1F2A37"/>
                 </a:solidFill>
                 <a:latin typeface="Amiri" pitchFamily="2" charset="-78"/>
+                <a:ea typeface="Amiri" pitchFamily="2" charset="-78"/>
                 <a:cs typeface="Amiri" pitchFamily="2" charset="-78"/>
               </a:rPr>
               <a:t>ب</a:t>
@@ -7833,6 +7886,7 @@
                   <a:srgbClr val="D4AF37"/>
                 </a:solidFill>
                 <a:latin typeface="Amiri" pitchFamily="2" charset="-78"/>
+                <a:ea typeface="Amiri" pitchFamily="2" charset="-78"/>
                 <a:cs typeface="Amiri" pitchFamily="2" charset="-78"/>
               </a:rPr>
               <a:t>م</a:t>
@@ -8090,6 +8144,7 @@
                   <a:srgbClr val="8A6D1E"/>
                 </a:solidFill>
                 <a:latin typeface="Amiri" pitchFamily="2" charset="-78"/>
+                <a:ea typeface="Amiri" pitchFamily="2" charset="-78"/>
                 <a:cs typeface="Amiri" pitchFamily="2" charset="-78"/>
               </a:rPr>
               <a:t>أ</a:t>
@@ -8154,6 +8209,7 @@
                   <a:srgbClr val="1B3B6F"/>
                 </a:solidFill>
                 <a:latin typeface="Amiri" pitchFamily="2" charset="-78"/>
+                <a:ea typeface="Amiri" pitchFamily="2" charset="-78"/>
                 <a:cs typeface="Amiri" pitchFamily="2" charset="-78"/>
               </a:rPr>
               <a:t>أ</a:t>
@@ -8205,6 +8261,7 @@
                   <a:srgbClr val="8A6D1E"/>
                 </a:solidFill>
                 <a:latin typeface="Amiri" pitchFamily="2" charset="-78"/>
+                <a:ea typeface="Amiri" pitchFamily="2" charset="-78"/>
                 <a:cs typeface="Amiri" pitchFamily="2" charset="-78"/>
               </a:rPr>
               <a:t>نَمُوذَجُ الإِجَابَةِ</a:t>
@@ -8318,6 +8375,7 @@
                   <a:srgbClr val="1F2A37"/>
                 </a:solidFill>
                 <a:latin typeface="Amiri" pitchFamily="2" charset="-78"/>
+                <a:ea typeface="Amiri" pitchFamily="2" charset="-78"/>
                 <a:cs typeface="Amiri" pitchFamily="2" charset="-78"/>
               </a:rPr>
               <a:t>فِي الصَّيْفِ المَاضِي شَارَكْتُ فِي بَرْنَامَجِ تَبَادُلٍ ثَقَافِيٍّ، وَقَضَيْتُ ثَلَاثَةَ أَسَابِيعَ فِي مَدِينَةِ فَاسَ فِي المَغْرِبِ. سَافَرْتُ بِالطَّائِرَةِ مِنْ لَنْدَنَ إِلَى مُرَّاكُشَ، ثُمَّ بِالقِطَارِ إِلَى فَاسَ، وَكَانَتِ الرِّحْلَةُ طَوِيلَةً.</a:t>
@@ -8337,6 +8395,7 @@
                   <a:srgbClr val="1F2A37"/>
                 </a:solidFill>
                 <a:latin typeface="Amiri" pitchFamily="2" charset="-78"/>
+                <a:ea typeface="Amiri" pitchFamily="2" charset="-78"/>
                 <a:cs typeface="Amiri" pitchFamily="2" charset="-78"/>
               </a:rPr>
               <a:t>أَقَمْتُ عِنْدَ عَائِلَةٍ مَغْرِبِيَّةٍ لَطِيفَةٍ جِدًّا. كُنْتُ أَسْتَيْقِظُ فِي السَّابِعَةِ، وَأَذْهَبُ إِلَى المَدْرَسَةِ مَعَ ابْنَتِهِمْ سُكَيْنَةَ. فِي المَسَاءِ كُنَّا نَزُورُ الأَقَارِبَ، أَوْ نَمْشِي فِي المَدِينَةِ القَدِيمَةِ، وَنَشْتَرِي الحَلَوِيَّاتِ مِنَ السُّوقِ.</a:t>
@@ -8356,6 +8415,7 @@
                   <a:srgbClr val="1F2A37"/>
                 </a:solidFill>
                 <a:latin typeface="Amiri" pitchFamily="2" charset="-78"/>
+                <a:ea typeface="Amiri" pitchFamily="2" charset="-78"/>
                 <a:cs typeface="Amiri" pitchFamily="2" charset="-78"/>
               </a:rPr>
               <a:t>لَاحَظْتُ اخْتِلَافَاتٍ كَثِيرَةً. مَثَلًا، النَّاسُ يَتَعَشَّوْنَ مُتَأَخِّرِينَ بِسَبَبِ الحَرِّ، وَيَتَكَلَّمُونَ الدَّارِجَةَ وَالفَرَنْسِيَّةَ، وَيَشْرَبُونَ الشَّايَ بِالنَّعْنَاعِ بَعْدَ كُلِّ وَجْبَةٍ. فِي البِدَايَةِ لَمْ أَفْهَمْ كَثِيرًا، لِذٰلِكَ كُنْتُ أَطْلُبُ مِنْهُمْ أَنْ يَتَكَلَّمُوا بِبُطْءٍ.</a:t>
@@ -8375,6 +8435,7 @@
                   <a:srgbClr val="1F2A37"/>
                 </a:solidFill>
                 <a:latin typeface="Amiri" pitchFamily="2" charset="-78"/>
+                <a:ea typeface="Amiri" pitchFamily="2" charset="-78"/>
                 <a:cs typeface="Amiri" pitchFamily="2" charset="-78"/>
               </a:rPr>
               <a:t>هٰذِهِ الرِّحْلَةُ غَيَّرَتْ نَظْرَتِي، لِأَنِّي فَهِمْتُ أَنَّ النَّاسَ فِي كُلِّ مَكَانٍ كُرَمَاءُ. الآنَ أَتَكَلَّمُ العَرَبِيَّةَ بِثِقَةٍ أَكْبَرَ مِنْ قَبْلُ. فِي المُسْتَقْبَلِ سَأَعُودُ إِلَى المَغْرِبِ، وَآمُلُ أَنْ تَزُورَنِي سُكَيْنَةُ فِي لَنْدَنَ.</a:t>
@@ -8538,11 +8599,12 @@
               <a:buNone/>
             </a:pPr>
             <a:r>
-              <a:rPr lang="en-US" sz="950" b="1" dirty="0">
+              <a:rPr lang="ar-SA" sz="950" b="1" dirty="0">
                 <a:solidFill>
                   <a:srgbClr val="FFFFFF"/>
                 </a:solidFill>
                 <a:latin typeface="Calibri" pitchFamily="34" charset="0"/>
+                <a:ea typeface="Amiri" pitchFamily="2" charset="-78"/>
                 <a:cs typeface="Amiri" pitchFamily="2" charset="-78"/>
               </a:rPr>
               <a:t>قَضَيْتُ ثَلَاثَةَ أَسَابِيعَ</a:t>
@@ -8603,11 +8665,12 @@
               <a:buNone/>
             </a:pPr>
             <a:r>
-              <a:rPr lang="en-US" sz="950" b="1" dirty="0">
+              <a:rPr lang="ar-SA" sz="950" b="1" dirty="0">
                 <a:solidFill>
                   <a:srgbClr val="FFFFFF"/>
                 </a:solidFill>
                 <a:latin typeface="Calibri" pitchFamily="34" charset="0"/>
+                <a:ea typeface="Amiri" pitchFamily="2" charset="-78"/>
                 <a:cs typeface="Amiri" pitchFamily="2" charset="-78"/>
               </a:rPr>
               <a:t>كُنْتُ أَسْتَيْقِظُ</a:t>
@@ -8668,11 +8731,12 @@
               <a:buNone/>
             </a:pPr>
             <a:r>
-              <a:rPr lang="en-US" sz="950" b="1" dirty="0">
+              <a:rPr lang="ar-SA" sz="950" b="1" dirty="0">
                 <a:solidFill>
                   <a:srgbClr val="FFFFFF"/>
                 </a:solidFill>
                 <a:latin typeface="Calibri" pitchFamily="34" charset="0"/>
+                <a:ea typeface="Amiri" pitchFamily="2" charset="-78"/>
                 <a:cs typeface="Amiri" pitchFamily="2" charset="-78"/>
               </a:rPr>
               <a:t>بِسَبَبِ الحَرِّ</a:t>
@@ -8733,11 +8797,12 @@
               <a:buNone/>
             </a:pPr>
             <a:r>
-              <a:rPr lang="en-US" sz="950" b="1" dirty="0">
+              <a:rPr lang="ar-SA" sz="950" b="1" dirty="0">
                 <a:solidFill>
                   <a:srgbClr val="FFFFFF"/>
                 </a:solidFill>
                 <a:latin typeface="Calibri" pitchFamily="34" charset="0"/>
+                <a:ea typeface="Amiri" pitchFamily="2" charset="-78"/>
                 <a:cs typeface="Amiri" pitchFamily="2" charset="-78"/>
               </a:rPr>
               <a:t>لِذٰلِكَ كُنْتُ أَطْلُبُ</a:t>
@@ -8871,6 +8936,7 @@
                   <a:srgbClr val="D4AF37"/>
                 </a:solidFill>
                 <a:latin typeface="Amiri" pitchFamily="2" charset="-78"/>
+                <a:ea typeface="Amiri" pitchFamily="2" charset="-78"/>
                 <a:cs typeface="Amiri" pitchFamily="2" charset="-78"/>
               </a:rPr>
               <a:t>م</a:t>
@@ -9128,6 +9194,7 @@
                   <a:srgbClr val="8A6D1E"/>
                 </a:solidFill>
                 <a:latin typeface="Amiri" pitchFamily="2" charset="-78"/>
+                <a:ea typeface="Amiri" pitchFamily="2" charset="-78"/>
                 <a:cs typeface="Amiri" pitchFamily="2" charset="-78"/>
               </a:rPr>
               <a:t>أ</a:t>
@@ -9192,6 +9259,7 @@
                   <a:srgbClr val="1B3B6F"/>
                 </a:solidFill>
                 <a:latin typeface="Amiri" pitchFamily="2" charset="-78"/>
+                <a:ea typeface="Amiri" pitchFamily="2" charset="-78"/>
                 <a:cs typeface="Amiri" pitchFamily="2" charset="-78"/>
               </a:rPr>
               <a:t>أ</a:t>
@@ -9243,6 +9311,7 @@
                   <a:srgbClr val="8A6D1E"/>
                 </a:solidFill>
                 <a:latin typeface="Amiri" pitchFamily="2" charset="-78"/>
+                <a:ea typeface="Amiri" pitchFamily="2" charset="-78"/>
                 <a:cs typeface="Amiri" pitchFamily="2" charset="-78"/>
               </a:rPr>
               <a:t>نَمُوذَجُ الإِجَابَةِ</a:t>
@@ -9356,6 +9425,7 @@
                   <a:srgbClr val="1F2A37"/>
                 </a:solidFill>
                 <a:latin typeface="Amiri" pitchFamily="2" charset="-78"/>
+                <a:ea typeface="Amiri" pitchFamily="2" charset="-78"/>
                 <a:cs typeface="Amiri" pitchFamily="2" charset="-78"/>
               </a:rPr>
               <a:t>قَبْلَ أَنْ أُسَافِرَ إِلَى فَاسَ، كُنْتُ أَظُنُّ أَنَّنِي أَعْرِفُ المَغْرِبَ؛ فَقَدْ رَأَيْتُ صُوَرَهُ عَلَى الإِنْتَرْنِتِ مِئَاتِ المَرَّاتِ، وَقَرَأْتُ عَنْ تَارِيخِهِ فِي الكُتُبِ. غَيْرَ أَنَّ ثَلَاثَةَ أَسَابِيعَ مَعَ عَائِلَةٍ مَغْرِبِيَّةٍ عَلَّمَتْنِي أَنَّ الصُّورَةَ شَيْءٌ، وَالحَيَاةَ شَيْءٌ آخَرُ.</a:t>
@@ -9375,6 +9445,7 @@
                   <a:srgbClr val="1F2A37"/>
                 </a:solidFill>
                 <a:latin typeface="Amiri" pitchFamily="2" charset="-78"/>
+                <a:ea typeface="Amiri" pitchFamily="2" charset="-78"/>
                 <a:cs typeface="Amiri" pitchFamily="2" charset="-78"/>
               </a:rPr>
               <a:t>فَمُنْذُ اليَوْمِ الأَوَّلِ، اسْتَقْبَلَتْنِي "أُمِّي المَغْرِبِيَّةُ" بِالحَلِيبِ وَالتَّمْرِ، وَصَارَتِ ابْنَتُهَا سُكَيْنَةُ دَلِيلِي فِي أَزِقَّةِ المَدِينَةِ القَدِيمَةِ الَّتِي لَا يَعْرِفُ أَسْرَارَهَا إِلَّا أَهْلُهَا، فَكُنَّا نَضِيعُ وَنَضْحَكُ مَعًا. وَكُنْتُ أَقْضِي المَسَاءَ فِي سَهَرَاتٍ عَائِلِيَّةٍ لَا تَبْدَأُ إِلَّا بَعْدَ العَاشِرَةِ بِسَبَبِ حَرَارَةِ النَّهَارِ.</a:t>
@@ -9394,6 +9465,7 @@
                   <a:srgbClr val="1F2A37"/>
                 </a:solidFill>
                 <a:latin typeface="Amiri" pitchFamily="2" charset="-78"/>
+                <a:ea typeface="Amiri" pitchFamily="2" charset="-78"/>
                 <a:cs typeface="Amiri" pitchFamily="2" charset="-78"/>
               </a:rPr>
               <a:t>وَلَمْ تَكُنِ التَّجْرِبَةُ سَهْلَةً دَائِمًا؛ فَالدَّارِجَةُ سَرِيعَةٌ، مِمَّا جَعَلَنِي أَشْعُرُ بِالعُزْلَةِ فِي الأَيَّامِ الأُولَى. وَلٰكِنْ حِينَ بَدَأْتُ أَسْأَلُ بَدَلًا مِنْ أَنْ أَصْمُتَ، انْفَتَحَتْ لِي الأَبْوَابُ وَالقُلُوبُ، وَصَارَ الجِيرَانُ يُنَادُونَنِي بِاسْمِي فِي السُّوقِ.</a:t>
@@ -9413,6 +9485,7 @@
                   <a:srgbClr val="1F2A37"/>
                 </a:solidFill>
                 <a:latin typeface="Amiri" pitchFamily="2" charset="-78"/>
+                <a:ea typeface="Amiri" pitchFamily="2" charset="-78"/>
                 <a:cs typeface="Amiri" pitchFamily="2" charset="-78"/>
               </a:rPr>
               <a:t>وَنَتِيجَةً لِذٰلِكَ، عُدْتُ بِثِقَةٍ أَكْبَرَ وَصُوَرٍ نَمَطِيَّةٍ أَقَلَّ، وَبِصَدَاقَاتٍ سَتَدُومُ طَوِيلًا. وَلَوْ سَأَلَنِي أَحَدٌ عَنْ أَهَمِّ مَا تَعَلَّمْتُهُ، لَقُلْتُ: "لَا تَعْرِفُ بَلَدًا حَتَّى تَأْكُلَ عَلَى مَائِدَةِ أَهْلِهِ".</a:t>
@@ -9511,11 +9584,12 @@
               <a:buNone/>
             </a:pPr>
             <a:r>
-              <a:rPr lang="en-US" sz="950" b="1" dirty="0">
+              <a:rPr lang="ar-SA" sz="950" b="1" dirty="0">
                 <a:solidFill>
                   <a:srgbClr val="FFFFFF"/>
                 </a:solidFill>
                 <a:latin typeface="Calibri" pitchFamily="34" charset="0"/>
+                <a:ea typeface="Amiri" pitchFamily="2" charset="-78"/>
                 <a:cs typeface="Amiri" pitchFamily="2" charset="-78"/>
               </a:rPr>
               <a:t>قَبْلَ أَنْ أُسَافِرَ</a:t>
@@ -9576,11 +9650,12 @@
               <a:buNone/>
             </a:pPr>
             <a:r>
-              <a:rPr lang="en-US" sz="950" b="1" dirty="0">
+              <a:rPr lang="ar-SA" sz="950" b="1" dirty="0">
                 <a:solidFill>
                   <a:srgbClr val="FFFFFF"/>
                 </a:solidFill>
                 <a:latin typeface="Calibri" pitchFamily="34" charset="0"/>
+                <a:ea typeface="Amiri" pitchFamily="2" charset="-78"/>
                 <a:cs typeface="Amiri" pitchFamily="2" charset="-78"/>
               </a:rPr>
               <a:t>لَا يَعْرِفُ … إِلَّا</a:t>
@@ -9641,11 +9716,12 @@
               <a:buNone/>
             </a:pPr>
             <a:r>
-              <a:rPr lang="en-US" sz="950" b="1" dirty="0">
+              <a:rPr lang="ar-SA" sz="950" b="1" dirty="0">
                 <a:solidFill>
                   <a:srgbClr val="FFFFFF"/>
                 </a:solidFill>
                 <a:latin typeface="Calibri" pitchFamily="34" charset="0"/>
+                <a:ea typeface="Amiri" pitchFamily="2" charset="-78"/>
                 <a:cs typeface="Amiri" pitchFamily="2" charset="-78"/>
               </a:rPr>
               <a:t>مِمَّا جَعَلَنِي</a:t>
@@ -9706,11 +9782,12 @@
               <a:buNone/>
             </a:pPr>
             <a:r>
-              <a:rPr lang="en-US" sz="950" b="1" dirty="0">
+              <a:rPr lang="ar-SA" sz="950" b="1" dirty="0">
                 <a:solidFill>
                   <a:srgbClr val="FFFFFF"/>
                 </a:solidFill>
                 <a:latin typeface="Calibri" pitchFamily="34" charset="0"/>
+                <a:ea typeface="Amiri" pitchFamily="2" charset="-78"/>
                 <a:cs typeface="Amiri" pitchFamily="2" charset="-78"/>
               </a:rPr>
               <a:t>نَتِيجَةً لِذٰلِكَ</a:t>
@@ -9844,6 +9921,7 @@
                   <a:srgbClr val="D4AF37"/>
                 </a:solidFill>
                 <a:latin typeface="Amiri" pitchFamily="2" charset="-78"/>
+                <a:ea typeface="Amiri" pitchFamily="2" charset="-78"/>
                 <a:cs typeface="Amiri" pitchFamily="2" charset="-78"/>
               </a:rPr>
               <a:t>م</a:t>
@@ -10101,6 +10179,7 @@
                   <a:srgbClr val="8A6D1E"/>
                 </a:solidFill>
                 <a:latin typeface="Amiri" pitchFamily="2" charset="-78"/>
+                <a:ea typeface="Amiri" pitchFamily="2" charset="-78"/>
                 <a:cs typeface="Amiri" pitchFamily="2" charset="-78"/>
               </a:rPr>
               <a:t>ب</a:t>
@@ -10165,6 +10244,7 @@
                   <a:srgbClr val="1B3B6F"/>
                 </a:solidFill>
                 <a:latin typeface="Amiri" pitchFamily="2" charset="-78"/>
+                <a:ea typeface="Amiri" pitchFamily="2" charset="-78"/>
                 <a:cs typeface="Amiri" pitchFamily="2" charset="-78"/>
               </a:rPr>
               <a:t>ب</a:t>
@@ -10216,6 +10296,7 @@
                   <a:srgbClr val="8A6D1E"/>
                 </a:solidFill>
                 <a:latin typeface="Amiri" pitchFamily="2" charset="-78"/>
+                <a:ea typeface="Amiri" pitchFamily="2" charset="-78"/>
                 <a:cs typeface="Amiri" pitchFamily="2" charset="-78"/>
               </a:rPr>
               <a:t>نَمُوذَجُ الإِجَابَةِ</a:t>
@@ -10329,6 +10410,7 @@
                   <a:srgbClr val="1F2A37"/>
                 </a:solidFill>
                 <a:latin typeface="Amiri" pitchFamily="2" charset="-78"/>
+                <a:ea typeface="Amiri" pitchFamily="2" charset="-78"/>
                 <a:cs typeface="Amiri" pitchFamily="2" charset="-78"/>
               </a:rPr>
               <a:t>يُسَافِرُ اليَوْمَ مِئَاتُ المَلَايِينِ مِنَ البَشَرِ كُلَّ عَامٍ، وَيُقَالُ إِنَّ السَّفَرَ يُقَرِّبُ الشُّعُوبَ. وَلٰكِنْ هَلْ يُسَاعِدُنَا السَّفَرُ حَقًّا عَلَى فَهْمِ الآخَرِينَ، أَمْ أَنَّنَا نَرَى مَا نُرِيدُ أَنْ نَرَاهُ فَقَطْ؟</a:t>
@@ -10348,6 +10430,7 @@
                   <a:srgbClr val="1F2A37"/>
                 </a:solidFill>
                 <a:latin typeface="Amiri" pitchFamily="2" charset="-78"/>
+                <a:ea typeface="Amiri" pitchFamily="2" charset="-78"/>
                 <a:cs typeface="Amiri" pitchFamily="2" charset="-78"/>
               </a:rPr>
               <a:t>مِنْ نَاحِيَةٍ، يَكْسِرُ السَّفَرُ الصُّوَرَ النَّمَطِيَّةَ، لِأَنَّنَا نَلْتَقِي بِأُنَاسٍ حَقِيقِيِّينَ بَدَلًا مِنْ صُوَرِ الأَخْبَارِ وَالأَفْلَامِ. وَمِنْ نَاحِيَةٍ أُخْرَى، يَقْضِي كَثِيرٌ مِنَ السُّيَّاحِ عُطْلَتَهُمْ فِي فَنَادِقَ مُغْلَقَةٍ، فَلَا يَتَحَدَّثُونَ إِلَّا مَعَ مُوَظَّفِي الاسْتِقْبَالِ، مِمَّا يَجْعَلُهُمْ يَعُودُونَ بِالأَفْكَارِ نَفْسِهَا.</a:t>
@@ -10367,6 +10450,7 @@
                   <a:srgbClr val="1F2A37"/>
                 </a:solidFill>
                 <a:latin typeface="Amiri" pitchFamily="2" charset="-78"/>
+                <a:ea typeface="Amiri" pitchFamily="2" charset="-78"/>
                 <a:cs typeface="Amiri" pitchFamily="2" charset="-78"/>
               </a:rPr>
               <a:t>وَقَدْ رَأَيْتُ الفَرْقَ بِنَفْسِي؛ فَفِي رِحْلَتِي الأُولَى إِلَى تُونِسَ، بَقِيتُ فِي مُنْتَجَعٍ عَلَى الشَّاطِئِ، وَلَمْ أَتَعَلَّمْ شَيْئًا عَنْ حَيَاةِ التُّونِسِيِّينَ الحَقِيقِيَّةِ. أَمَّا فِي بَرْنَامَجِ التَّبَادُلِ فِي فَاسَ، فَقَدْ عِشْتُ مَعَ عَائِلَةٍ، وَتَعَلَّمْتُ مِنْهَا مَا لَا تُعَلِّمُهُ الكُتُبُ: الكَرَمَ وَالصَّبْرَ وَحُبَّ العَائِلَةِ.</a:t>
@@ -10386,6 +10470,7 @@
                   <a:srgbClr val="1F2A37"/>
                 </a:solidFill>
                 <a:latin typeface="Amiri" pitchFamily="2" charset="-78"/>
+                <a:ea typeface="Amiri" pitchFamily="2" charset="-78"/>
                 <a:cs typeface="Amiri" pitchFamily="2" charset="-78"/>
               </a:rPr>
               <a:t>لِذٰلِكَ أَرَى أَنَّ السَّفَرَ وَحْدَهُ لَا يَكْفِي، بَلِ المُهِمُّ كَيْفَ نُسَافِرُ. فَإِذَا خَرَجْنَا مِنَ الفُنْدُقِ إِلَى البُيُوتِ وَالأَسْوَاقِ وَالمَقَاهِي، فَسَيُصْبِحُ كُلُّ سَفَرٍ دَرْسًا فِي التَّفَاهُمِ وَالاحْتِرَامِ المُتَبَادَلِ.</a:t>
@@ -10484,11 +10569,12 @@
               <a:buNone/>
             </a:pPr>
             <a:r>
-              <a:rPr lang="en-US" sz="950" b="1" dirty="0">
+              <a:rPr lang="ar-SA" sz="950" b="1" dirty="0">
                 <a:solidFill>
                   <a:srgbClr val="FFFFFF"/>
                 </a:solidFill>
                 <a:latin typeface="Calibri" pitchFamily="34" charset="0"/>
+                <a:ea typeface="Amiri" pitchFamily="2" charset="-78"/>
                 <a:cs typeface="Amiri" pitchFamily="2" charset="-78"/>
               </a:rPr>
               <a:t>يُقَالُ إِنَّ</a:t>
@@ -10549,11 +10635,12 @@
               <a:buNone/>
             </a:pPr>
             <a:r>
-              <a:rPr lang="en-US" sz="950" b="1" dirty="0">
+              <a:rPr lang="ar-SA" sz="950" b="1" dirty="0">
                 <a:solidFill>
                   <a:srgbClr val="FFFFFF"/>
                 </a:solidFill>
                 <a:latin typeface="Calibri" pitchFamily="34" charset="0"/>
+                <a:ea typeface="Amiri" pitchFamily="2" charset="-78"/>
                 <a:cs typeface="Amiri" pitchFamily="2" charset="-78"/>
               </a:rPr>
               <a:t>هَلْ … أَمْ أَنَّنَا</a:t>
@@ -10614,11 +10701,12 @@
               <a:buNone/>
             </a:pPr>
             <a:r>
-              <a:rPr lang="en-US" sz="950" b="1" dirty="0">
+              <a:rPr lang="ar-SA" sz="950" b="1" dirty="0">
                 <a:solidFill>
                   <a:srgbClr val="FFFFFF"/>
                 </a:solidFill>
                 <a:latin typeface="Calibri" pitchFamily="34" charset="0"/>
+                <a:ea typeface="Amiri" pitchFamily="2" charset="-78"/>
                 <a:cs typeface="Amiri" pitchFamily="2" charset="-78"/>
               </a:rPr>
               <a:t>مِمَّا يَجْعَلُهُمْ</a:t>
@@ -10679,11 +10767,12 @@
               <a:buNone/>
             </a:pPr>
             <a:r>
-              <a:rPr lang="en-US" sz="950" b="1" dirty="0">
+              <a:rPr lang="ar-SA" sz="950" b="1" dirty="0">
                 <a:solidFill>
                   <a:srgbClr val="FFFFFF"/>
                 </a:solidFill>
                 <a:latin typeface="Calibri" pitchFamily="34" charset="0"/>
+                <a:ea typeface="Amiri" pitchFamily="2" charset="-78"/>
                 <a:cs typeface="Amiri" pitchFamily="2" charset="-78"/>
               </a:rPr>
               <a:t>لَا يَكْفِي، بَلِ</a:t>
@@ -10817,6 +10906,7 @@
                   <a:srgbClr val="D4AF37"/>
                 </a:solidFill>
                 <a:latin typeface="Amiri" pitchFamily="2" charset="-78"/>
+                <a:ea typeface="Amiri" pitchFamily="2" charset="-78"/>
                 <a:cs typeface="Amiri" pitchFamily="2" charset="-78"/>
               </a:rPr>
               <a:t>م</a:t>
@@ -11137,6 +11227,7 @@
                   <a:srgbClr val="8A6D1E"/>
                 </a:solidFill>
                 <a:latin typeface="Amiri" pitchFamily="2" charset="-78"/>
+                <a:ea typeface="Amiri" pitchFamily="2" charset="-78"/>
                 <a:cs typeface="Amiri" pitchFamily="2" charset="-78"/>
               </a:rPr>
               <a:t>قَيِّمْ عَمَلَكَ</a:t>
@@ -12381,6 +12472,7 @@
                   <a:srgbClr val="FFFFFF"/>
                 </a:solidFill>
                 <a:latin typeface="Amiri" pitchFamily="2" charset="-78"/>
+                <a:ea typeface="Amiri" pitchFamily="2" charset="-78"/>
                 <a:cs typeface="Amiri" pitchFamily="2" charset="-78"/>
               </a:rPr>
               <a:t>أَحْسَنْتُمْ! إِلَى اللِّقَاءِ</a:t>
@@ -12533,6 +12625,7 @@
                   <a:srgbClr val="D4AF37"/>
                 </a:solidFill>
                 <a:latin typeface="Amiri" pitchFamily="2" charset="-78"/>
+                <a:ea typeface="Amiri" pitchFamily="2" charset="-78"/>
                 <a:cs typeface="Amiri" pitchFamily="2" charset="-78"/>
               </a:rPr>
               <a:t>وَرْشَةُ التَّدْرِيبِ</a:t>
@@ -12666,6 +12759,7 @@
                   <a:srgbClr val="D4AF37"/>
                 </a:solidFill>
                 <a:latin typeface="Amiri" pitchFamily="2" charset="-78"/>
+                <a:ea typeface="Amiri" pitchFamily="2" charset="-78"/>
                 <a:cs typeface="Amiri" pitchFamily="2" charset="-78"/>
               </a:rPr>
               <a:t>م</a:t>
@@ -12986,6 +13080,7 @@
                   <a:srgbClr val="8A6D1E"/>
                 </a:solidFill>
                 <a:latin typeface="Amiri" pitchFamily="2" charset="-78"/>
+                <a:ea typeface="Amiri" pitchFamily="2" charset="-78"/>
                 <a:cs typeface="Amiri" pitchFamily="2" charset="-78"/>
               </a:rPr>
               <a:t>آدَابُ الصَّفِّ</a:t>
@@ -14517,6 +14612,7 @@
                   <a:srgbClr val="D4AF37"/>
                 </a:solidFill>
                 <a:latin typeface="Amiri" pitchFamily="2" charset="-78"/>
+                <a:ea typeface="Amiri" pitchFamily="2" charset="-78"/>
                 <a:cs typeface="Amiri" pitchFamily="2" charset="-78"/>
               </a:rPr>
               <a:t>م</a:t>
@@ -14837,6 +14933,7 @@
                   <a:srgbClr val="8A6D1E"/>
                 </a:solidFill>
                 <a:latin typeface="Amiri" pitchFamily="2" charset="-78"/>
+                <a:ea typeface="Amiri" pitchFamily="2" charset="-78"/>
                 <a:cs typeface="Amiri" pitchFamily="2" charset="-78"/>
               </a:rPr>
               <a:t>خَرِيطَةُ الوَرْشَةِ</a:t>
@@ -15151,6 +15248,7 @@
                   <a:srgbClr val="1B3B6F"/>
                 </a:solidFill>
                 <a:latin typeface="Amiri" pitchFamily="2" charset="-78"/>
+                <a:ea typeface="Amiri" pitchFamily="2" charset="-78"/>
                 <a:cs typeface="Amiri" pitchFamily="2" charset="-78"/>
               </a:rPr>
               <a:t>كَيْفَ</a:t>
@@ -15427,6 +15525,7 @@
                   <a:srgbClr val="1E6B52"/>
                 </a:solidFill>
                 <a:latin typeface="Amiri" pitchFamily="2" charset="-78"/>
+                <a:ea typeface="Amiri" pitchFamily="2" charset="-78"/>
                 <a:cs typeface="Amiri" pitchFamily="2" charset="-78"/>
               </a:rPr>
               <a:t>الاسْتِمَارَةُ</a:t>
@@ -15703,6 +15802,7 @@
                   <a:srgbClr val="1E6B52"/>
                 </a:solidFill>
                 <a:latin typeface="Amiri" pitchFamily="2" charset="-78"/>
+                <a:ea typeface="Amiri" pitchFamily="2" charset="-78"/>
                 <a:cs typeface="Amiri" pitchFamily="2" charset="-78"/>
               </a:rPr>
               <a:t>الرِّسَالَةُ</a:t>
@@ -15979,6 +16079,7 @@
                   <a:srgbClr val="1E6B52"/>
                 </a:solidFill>
                 <a:latin typeface="Amiri" pitchFamily="2" charset="-78"/>
+                <a:ea typeface="Amiri" pitchFamily="2" charset="-78"/>
                 <a:cs typeface="Amiri" pitchFamily="2" charset="-78"/>
               </a:rPr>
               <a:t>المَقَالُ</a:t>
@@ -16255,6 +16356,7 @@
                   <a:srgbClr val="8A6D1E"/>
                 </a:solidFill>
                 <a:latin typeface="Amiri" pitchFamily="2" charset="-78"/>
+                <a:ea typeface="Amiri" pitchFamily="2" charset="-78"/>
                 <a:cs typeface="Amiri" pitchFamily="2" charset="-78"/>
               </a:rPr>
               <a:t>قَيِّمْ</a:t>
@@ -16498,6 +16600,7 @@
                   <a:srgbClr val="D4AF37"/>
                 </a:solidFill>
                 <a:latin typeface="Amiri" pitchFamily="2" charset="-78"/>
+                <a:ea typeface="Amiri" pitchFamily="2" charset="-78"/>
                 <a:cs typeface="Amiri" pitchFamily="2" charset="-78"/>
               </a:rPr>
               <a:t>م</a:t>
@@ -16818,6 +16921,7 @@
                   <a:srgbClr val="8A6D1E"/>
                 </a:solidFill>
                 <a:latin typeface="Amiri" pitchFamily="2" charset="-78"/>
+                <a:ea typeface="Amiri" pitchFamily="2" charset="-78"/>
                 <a:cs typeface="Amiri" pitchFamily="2" charset="-78"/>
               </a:rPr>
               <a:t>امْتِحَانُ الكِتَابَةِ</a:t>
@@ -17442,6 +17546,7 @@
                   <a:srgbClr val="1B3B6F"/>
                 </a:solidFill>
                 <a:latin typeface="Amiri" pitchFamily="2" charset="-78"/>
+                <a:ea typeface="Amiri" pitchFamily="2" charset="-78"/>
                 <a:cs typeface="Amiri" pitchFamily="2" charset="-78"/>
               </a:rPr>
               <a:t>يَتَعَشَّوْنَ مُتَأَخِّرِينَ، لِأَنَّ الجَوَّ حَارٌّ فِي النَّهَارِ</a:t>
@@ -17541,6 +17646,7 @@
                   <a:srgbClr val="1B3B6F"/>
                 </a:solidFill>
                 <a:latin typeface="Amiri" pitchFamily="2" charset="-78"/>
+                <a:ea typeface="Amiri" pitchFamily="2" charset="-78"/>
                 <a:cs typeface="Amiri" pitchFamily="2" charset="-78"/>
               </a:rPr>
               <a:t>لَمْ أَفْهَمْ كَثِيرًا، لِذٰلِكَ كُنْتُ أَطْلُبُ …</a:t>
@@ -17640,6 +17746,7 @@
                   <a:srgbClr val="1B3B6F"/>
                 </a:solidFill>
                 <a:latin typeface="Amiri" pitchFamily="2" charset="-78"/>
+                <a:ea typeface="Amiri" pitchFamily="2" charset="-78"/>
                 <a:cs typeface="Amiri" pitchFamily="2" charset="-78"/>
               </a:rPr>
               <a:t>هٰذِهِ الرِّحْلَةُ غَيَّرَتْ نَظْرَتِي، لِأَنِّي فَهِمْتُ أَنَّ …</a:t>
@@ -17811,6 +17918,7 @@
                   <a:srgbClr val="D4AF37"/>
                 </a:solidFill>
                 <a:latin typeface="Amiri" pitchFamily="2" charset="-78"/>
+                <a:ea typeface="Amiri" pitchFamily="2" charset="-78"/>
                 <a:cs typeface="Amiri" pitchFamily="2" charset="-78"/>
               </a:rPr>
               <a:t>م</a:t>
@@ -18131,6 +18239,7 @@
                   <a:srgbClr val="8A6D1E"/>
                 </a:solidFill>
                 <a:latin typeface="Amiri" pitchFamily="2" charset="-78"/>
+                <a:ea typeface="Amiri" pitchFamily="2" charset="-78"/>
                 <a:cs typeface="Amiri" pitchFamily="2" charset="-78"/>
               </a:rPr>
               <a:t>اسْتِمَارَةُ طَلَبِ التَّبَادُلِ الثَّقَافِيِّ</a:t>
@@ -18487,6 +18596,7 @@
                   <a:srgbClr val="1B3B6F"/>
                 </a:solidFill>
                 <a:latin typeface="Amiri" pitchFamily="2" charset="-78"/>
+                <a:ea typeface="Amiri" pitchFamily="2" charset="-78"/>
                 <a:cs typeface="Amiri" pitchFamily="2" charset="-78"/>
               </a:rPr>
               <a:t>الاسْمُ</a:t>
@@ -18731,6 +18841,7 @@
                   <a:srgbClr val="1B3B6F"/>
                 </a:solidFill>
                 <a:latin typeface="Amiri" pitchFamily="2" charset="-78"/>
+                <a:ea typeface="Amiri" pitchFamily="2" charset="-78"/>
                 <a:cs typeface="Amiri" pitchFamily="2" charset="-78"/>
               </a:rPr>
               <a:t>العُمْرُ</a:t>
@@ -18975,6 +19086,7 @@
                   <a:srgbClr val="1B3B6F"/>
                 </a:solidFill>
                 <a:latin typeface="Amiri" pitchFamily="2" charset="-78"/>
+                <a:ea typeface="Amiri" pitchFamily="2" charset="-78"/>
                 <a:cs typeface="Amiri" pitchFamily="2" charset="-78"/>
               </a:rPr>
               <a:t>البَلَدُ المَطْلُوبُ</a:t>
@@ -19219,6 +19331,7 @@
                   <a:srgbClr val="1B3B6F"/>
                 </a:solidFill>
                 <a:latin typeface="Amiri" pitchFamily="2" charset="-78"/>
+                <a:ea typeface="Amiri" pitchFamily="2" charset="-78"/>
                 <a:cs typeface="Amiri" pitchFamily="2" charset="-78"/>
               </a:rPr>
               <a:t>مُدَّةُ الإِقَامَةِ</a:t>
@@ -19463,6 +19576,7 @@
                   <a:srgbClr val="1B3B6F"/>
                 </a:solidFill>
                 <a:latin typeface="Amiri" pitchFamily="2" charset="-78"/>
+                <a:ea typeface="Amiri" pitchFamily="2" charset="-78"/>
                 <a:cs typeface="Amiri" pitchFamily="2" charset="-78"/>
               </a:rPr>
               <a:t>نَوْعُ السَّكَنِ</a:t>
@@ -19707,6 +19821,7 @@
                   <a:srgbClr val="1B3B6F"/>
                 </a:solidFill>
                 <a:latin typeface="Amiri" pitchFamily="2" charset="-78"/>
+                <a:ea typeface="Amiri" pitchFamily="2" charset="-78"/>
                 <a:cs typeface="Amiri" pitchFamily="2" charset="-78"/>
               </a:rPr>
               <a:t>رِحْلَةٌ سَابِقَةٌ</a:t>
@@ -19951,6 +20066,7 @@
                   <a:srgbClr val="1B3B6F"/>
                 </a:solidFill>
                 <a:latin typeface="Amiri" pitchFamily="2" charset="-78"/>
+                <a:ea typeface="Amiri" pitchFamily="2" charset="-78"/>
                 <a:cs typeface="Amiri" pitchFamily="2" charset="-78"/>
               </a:rPr>
               <a:t>صُعُوبَةٌ تَتَوَقَّعِينَهَا</a:t>
@@ -20130,6 +20246,7 @@
                   <a:srgbClr val="1B3B6F"/>
                 </a:solidFill>
                 <a:latin typeface="Amiri" pitchFamily="2" charset="-78"/>
+                <a:ea typeface="Amiri" pitchFamily="2" charset="-78"/>
                 <a:cs typeface="Amiri" pitchFamily="2" charset="-78"/>
               </a:rPr>
               <a:t>جُمْلَةٌ: لِمَاذَا تُرِيدِينَ المُشَارَكَةَ؟</a:t>
@@ -20339,6 +20456,7 @@
                   <a:srgbClr val="D4AF37"/>
                 </a:solidFill>
                 <a:latin typeface="Amiri" pitchFamily="2" charset="-78"/>
+                <a:ea typeface="Amiri" pitchFamily="2" charset="-78"/>
                 <a:cs typeface="Amiri" pitchFamily="2" charset="-78"/>
               </a:rPr>
               <a:t>م</a:t>
@@ -20659,6 +20777,7 @@
                   <a:srgbClr val="8A6D1E"/>
                 </a:solidFill>
                 <a:latin typeface="Amiri" pitchFamily="2" charset="-78"/>
+                <a:ea typeface="Amiri" pitchFamily="2" charset="-78"/>
                 <a:cs typeface="Amiri" pitchFamily="2" charset="-78"/>
               </a:rPr>
               <a:t>نَمُوذَجُ الإِجَابَةِ</a:t>
@@ -20977,6 +21096,7 @@
                   <a:srgbClr val="1B3B6F"/>
                 </a:solidFill>
                 <a:latin typeface="Amiri" pitchFamily="2" charset="-78"/>
+                <a:ea typeface="Amiri" pitchFamily="2" charset="-78"/>
                 <a:cs typeface="Amiri" pitchFamily="2" charset="-78"/>
               </a:rPr>
               <a:t>لَيْلَى مُحَمَّدٌ</a:t>
@@ -21015,6 +21135,7 @@
                   <a:srgbClr val="1B3B6F"/>
                 </a:solidFill>
                 <a:latin typeface="Amiri" pitchFamily="2" charset="-78"/>
+                <a:ea typeface="Amiri" pitchFamily="2" charset="-78"/>
                 <a:cs typeface="Amiri" pitchFamily="2" charset="-78"/>
               </a:rPr>
               <a:t>الاسْمُ</a:t>
@@ -21156,6 +21277,7 @@
                   <a:srgbClr val="1B3B6F"/>
                 </a:solidFill>
                 <a:latin typeface="Amiri" pitchFamily="2" charset="-78"/>
+                <a:ea typeface="Amiri" pitchFamily="2" charset="-78"/>
                 <a:cs typeface="Amiri" pitchFamily="2" charset="-78"/>
               </a:rPr>
               <a:t>سِتَّ عَشْرَةَ سَنَةً</a:t>
@@ -21194,6 +21316,7 @@
                   <a:srgbClr val="1B3B6F"/>
                 </a:solidFill>
                 <a:latin typeface="Amiri" pitchFamily="2" charset="-78"/>
+                <a:ea typeface="Amiri" pitchFamily="2" charset="-78"/>
                 <a:cs typeface="Amiri" pitchFamily="2" charset="-78"/>
               </a:rPr>
               <a:t>العُمْرُ</a:t>
@@ -21335,6 +21458,7 @@
                   <a:srgbClr val="1B3B6F"/>
                 </a:solidFill>
                 <a:latin typeface="Amiri" pitchFamily="2" charset="-78"/>
+                <a:ea typeface="Amiri" pitchFamily="2" charset="-78"/>
                 <a:cs typeface="Amiri" pitchFamily="2" charset="-78"/>
               </a:rPr>
               <a:t>المَغْرِبُ</a:t>
@@ -21373,6 +21497,7 @@
                   <a:srgbClr val="1B3B6F"/>
                 </a:solidFill>
                 <a:latin typeface="Amiri" pitchFamily="2" charset="-78"/>
+                <a:ea typeface="Amiri" pitchFamily="2" charset="-78"/>
                 <a:cs typeface="Amiri" pitchFamily="2" charset="-78"/>
               </a:rPr>
               <a:t>البَلَدُ المَطْلُوبُ</a:t>
@@ -21514,6 +21639,7 @@
                   <a:srgbClr val="1B3B6F"/>
                 </a:solidFill>
                 <a:latin typeface="Amiri" pitchFamily="2" charset="-78"/>
+                <a:ea typeface="Amiri" pitchFamily="2" charset="-78"/>
                 <a:cs typeface="Amiri" pitchFamily="2" charset="-78"/>
               </a:rPr>
               <a:t>ثَلَاثَةُ أَسَابِيعَ</a:t>
@@ -21552,6 +21678,7 @@
                   <a:srgbClr val="1B3B6F"/>
                 </a:solidFill>
                 <a:latin typeface="Amiri" pitchFamily="2" charset="-78"/>
+                <a:ea typeface="Amiri" pitchFamily="2" charset="-78"/>
                 <a:cs typeface="Amiri" pitchFamily="2" charset="-78"/>
               </a:rPr>
               <a:t>مُدَّةُ الإِقَامَةِ</a:t>
@@ -21693,6 +21820,7 @@
                   <a:srgbClr val="1B3B6F"/>
                 </a:solidFill>
                 <a:latin typeface="Amiri" pitchFamily="2" charset="-78"/>
+                <a:ea typeface="Amiri" pitchFamily="2" charset="-78"/>
                 <a:cs typeface="Amiri" pitchFamily="2" charset="-78"/>
               </a:rPr>
               <a:t>عِنْدَ عَائِلَةٍ مُضِيفَةٍ</a:t>
@@ -21731,6 +21859,7 @@
                   <a:srgbClr val="1B3B6F"/>
                 </a:solidFill>
                 <a:latin typeface="Amiri" pitchFamily="2" charset="-78"/>
+                <a:ea typeface="Amiri" pitchFamily="2" charset="-78"/>
                 <a:cs typeface="Amiri" pitchFamily="2" charset="-78"/>
               </a:rPr>
               <a:t>نَوْعُ السَّكَنِ</a:t>
@@ -21872,6 +22001,7 @@
                   <a:srgbClr val="1B3B6F"/>
                 </a:solidFill>
                 <a:latin typeface="Amiri" pitchFamily="2" charset="-78"/>
+                <a:ea typeface="Amiri" pitchFamily="2" charset="-78"/>
                 <a:cs typeface="Amiri" pitchFamily="2" charset="-78"/>
               </a:rPr>
               <a:t>مِصْرُ، الصَّيْفَ المَاضِيَ</a:t>
@@ -21910,6 +22040,7 @@
                   <a:srgbClr val="1B3B6F"/>
                 </a:solidFill>
                 <a:latin typeface="Amiri" pitchFamily="2" charset="-78"/>
+                <a:ea typeface="Amiri" pitchFamily="2" charset="-78"/>
                 <a:cs typeface="Amiri" pitchFamily="2" charset="-78"/>
               </a:rPr>
               <a:t>رِحْلَةٌ سَابِقَةٌ</a:t>
@@ -22051,6 +22182,7 @@
                   <a:srgbClr val="1B3B6F"/>
                 </a:solidFill>
                 <a:latin typeface="Amiri" pitchFamily="2" charset="-78"/>
+                <a:ea typeface="Amiri" pitchFamily="2" charset="-78"/>
                 <a:cs typeface="Amiri" pitchFamily="2" charset="-78"/>
               </a:rPr>
               <a:t>فَهْمُ الدَّارِجَةِ</a:t>
@@ -22089,6 +22221,7 @@
                   <a:srgbClr val="1B3B6F"/>
                 </a:solidFill>
                 <a:latin typeface="Amiri" pitchFamily="2" charset="-78"/>
+                <a:ea typeface="Amiri" pitchFamily="2" charset="-78"/>
                 <a:cs typeface="Amiri" pitchFamily="2" charset="-78"/>
               </a:rPr>
               <a:t>صُعُوبَةٌ تَتَوَقَّعِينَهَا</a:t>
@@ -22230,6 +22363,7 @@
                   <a:srgbClr val="1B3B6F"/>
                 </a:solidFill>
                 <a:latin typeface="Amiri" pitchFamily="2" charset="-78"/>
+                <a:ea typeface="Amiri" pitchFamily="2" charset="-78"/>
                 <a:cs typeface="Amiri" pitchFamily="2" charset="-78"/>
               </a:rPr>
               <a:t>أُرِيدُ أَنْ أَعِيشَ مَعَ عَائِلَةٍ عَرَبِيَّةٍ، لِأَنَّ ذٰلِكَ سَيُحَسِّنُ لُغَتِي أَكْثَرَ مِنَ الكُتُبِ.</a:t>
@@ -22268,6 +22402,7 @@
                   <a:srgbClr val="1B3B6F"/>
                 </a:solidFill>
                 <a:latin typeface="Amiri" pitchFamily="2" charset="-78"/>
+                <a:ea typeface="Amiri" pitchFamily="2" charset="-78"/>
                 <a:cs typeface="Amiri" pitchFamily="2" charset="-78"/>
               </a:rPr>
               <a:t>جُمْلَةٌ: لِمَاذَا تُرِيدِينَ المُشَارَكَةَ؟</a:t>
@@ -22477,6 +22612,7 @@
                   <a:srgbClr val="D4AF37"/>
                 </a:solidFill>
                 <a:latin typeface="Amiri" pitchFamily="2" charset="-78"/>
+                <a:ea typeface="Amiri" pitchFamily="2" charset="-78"/>
                 <a:cs typeface="Amiri" pitchFamily="2" charset="-78"/>
               </a:rPr>
               <a:t>م</a:t>
@@ -22797,6 +22933,7 @@
                   <a:srgbClr val="8A6D1E"/>
                 </a:solidFill>
                 <a:latin typeface="Amiri" pitchFamily="2" charset="-78"/>
+                <a:ea typeface="Amiri" pitchFamily="2" charset="-78"/>
                 <a:cs typeface="Amiri" pitchFamily="2" charset="-78"/>
               </a:rPr>
               <a:t>تَبَادُلِي فِي فَاسَ</a:t>
@@ -23272,6 +23409,7 @@
                   <a:srgbClr val="1B3B6F"/>
                 </a:solidFill>
                 <a:latin typeface="Amiri" pitchFamily="2" charset="-78"/>
+                <a:ea typeface="Amiri" pitchFamily="2" charset="-78"/>
                 <a:cs typeface="Amiri" pitchFamily="2" charset="-78"/>
               </a:rPr>
               <a:t>أُقِيمُ عِنْدَ عَائِلَةٍ …</a:t>
@@ -23348,6 +23486,7 @@
                   <a:srgbClr val="1B3B6F"/>
                 </a:solidFill>
                 <a:latin typeface="Amiri" pitchFamily="2" charset="-78"/>
+                <a:ea typeface="Amiri" pitchFamily="2" charset="-78"/>
                 <a:cs typeface="Amiri" pitchFamily="2" charset="-78"/>
               </a:rPr>
               <a:t>فِي الأُسْبُوعِ الأَوَّلِ زُرْتُ …</a:t>
@@ -23424,6 +23563,7 @@
                   <a:srgbClr val="1B3B6F"/>
                 </a:solidFill>
                 <a:latin typeface="Amiri" pitchFamily="2" charset="-78"/>
+                <a:ea typeface="Amiri" pitchFamily="2" charset="-78"/>
                 <a:cs typeface="Amiri" pitchFamily="2" charset="-78"/>
               </a:rPr>
               <a:t>لَاحَظْتُ أَنَّ … لِأَنَّ …</a:t>
@@ -23500,6 +23640,7 @@
                   <a:srgbClr val="1B3B6F"/>
                 </a:solidFill>
                 <a:latin typeface="Amiri" pitchFamily="2" charset="-78"/>
+                <a:ea typeface="Amiri" pitchFamily="2" charset="-78"/>
                 <a:cs typeface="Amiri" pitchFamily="2" charset="-78"/>
               </a:rPr>
               <a:t>فِي الأُسْبُوعِ القَادِمِ سَنُسَافِرُ …</a:t>
@@ -23671,6 +23812,7 @@
                   <a:srgbClr val="D4AF37"/>
                 </a:solidFill>
                 <a:latin typeface="Amiri" pitchFamily="2" charset="-78"/>
+                <a:ea typeface="Amiri" pitchFamily="2" charset="-78"/>
                 <a:cs typeface="Amiri" pitchFamily="2" charset="-78"/>
               </a:rPr>
               <a:t>م</a:t>
@@ -23991,6 +24133,7 @@
                   <a:srgbClr val="8A6D1E"/>
                 </a:solidFill>
                 <a:latin typeface="Amiri" pitchFamily="2" charset="-78"/>
+                <a:ea typeface="Amiri" pitchFamily="2" charset="-78"/>
                 <a:cs typeface="Amiri" pitchFamily="2" charset="-78"/>
               </a:rPr>
               <a:t>نَصُّ السُّؤَالِ</a:t>
@@ -24271,6 +24414,7 @@
                   <a:srgbClr val="1B3B6F"/>
                 </a:solidFill>
                 <a:latin typeface="Amiri" pitchFamily="2" charset="-78"/>
+                <a:ea typeface="Amiri" pitchFamily="2" charset="-78"/>
                 <a:cs typeface="Amiri" pitchFamily="2" charset="-78"/>
               </a:rPr>
               <a:t>اكْتُبِي رِسَالَةً إِلَى صَدِيقَتِكِ مِنْ بَرْنَامَجِ التَّبَادُلِ (٨٠–٩٠ كَلِمَةً).</a:t>
@@ -24412,6 +24556,7 @@
                   <a:srgbClr val="1B3B6F"/>
                 </a:solidFill>
                 <a:latin typeface="Amiri" pitchFamily="2" charset="-78"/>
+                <a:ea typeface="Amiri" pitchFamily="2" charset="-78"/>
                 <a:cs typeface="Amiri" pitchFamily="2" charset="-78"/>
               </a:rPr>
               <a:t>أَيْنَ أَنْتِ؟ وَعِنْدَ مَنْ تُقِيمِينَ؟</a:t>
@@ -24553,6 +24698,7 @@
                   <a:srgbClr val="1B3B6F"/>
                 </a:solidFill>
                 <a:latin typeface="Amiri" pitchFamily="2" charset="-78"/>
+                <a:ea typeface="Amiri" pitchFamily="2" charset="-78"/>
                 <a:cs typeface="Amiri" pitchFamily="2" charset="-78"/>
               </a:rPr>
               <a:t>مَاذَا فَعَلْتِ فِي الأُسْبُوعِ الأَوَّلِ؟</a:t>
@@ -24694,6 +24840,7 @@
                   <a:srgbClr val="1B3B6F"/>
                 </a:solidFill>
                 <a:latin typeface="Amiri" pitchFamily="2" charset="-78"/>
+                <a:ea typeface="Amiri" pitchFamily="2" charset="-78"/>
                 <a:cs typeface="Amiri" pitchFamily="2" charset="-78"/>
               </a:rPr>
               <a:t>مَا الاخْتِلَافُ الثَّقَافِيُّ الَّذِي لَاحَظْتِهِ؟ وَلِمَاذَا؟</a:t>
@@ -24835,6 +24982,7 @@
                   <a:srgbClr val="1B3B6F"/>
                 </a:solidFill>
                 <a:latin typeface="Amiri" pitchFamily="2" charset="-78"/>
+                <a:ea typeface="Amiri" pitchFamily="2" charset="-78"/>
                 <a:cs typeface="Amiri" pitchFamily="2" charset="-78"/>
               </a:rPr>
               <a:t>مَا شُعُورُكِ؟ وَمَا خِطَطُكِ؟ وَاسْأَلِي صَدِيقَتَكِ سُؤَالًا.</a:t>
@@ -25044,6 +25192,7 @@
                   <a:srgbClr val="D4AF37"/>
                 </a:solidFill>
                 <a:latin typeface="Amiri" pitchFamily="2" charset="-78"/>
+                <a:ea typeface="Amiri" pitchFamily="2" charset="-78"/>
                 <a:cs typeface="Amiri" pitchFamily="2" charset="-78"/>
               </a:rPr>
               <a:t>م</a:t>
@@ -25364,6 +25513,7 @@
                   <a:srgbClr val="8A6D1E"/>
                 </a:solidFill>
                 <a:latin typeface="Amiri" pitchFamily="2" charset="-78"/>
+                <a:ea typeface="Amiri" pitchFamily="2" charset="-78"/>
                 <a:cs typeface="Amiri" pitchFamily="2" charset="-78"/>
               </a:rPr>
               <a:t>قَوَالِبُ الكِتَابَةِ</a:t>
@@ -25644,6 +25794,7 @@
                   <a:srgbClr val="1B3B6F"/>
                 </a:solidFill>
                 <a:latin typeface="Amiri" pitchFamily="2" charset="-78"/>
+                <a:ea typeface="Amiri" pitchFamily="2" charset="-78"/>
                 <a:cs typeface="Amiri" pitchFamily="2" charset="-78"/>
               </a:rPr>
               <a:t>مَرْحَبًا يَا ______ ، أَنَا الآنَ فِي ______ .</a:t>
@@ -25850,6 +26001,7 @@
                   <a:srgbClr val="1B3B6F"/>
                 </a:solidFill>
                 <a:latin typeface="Amiri" pitchFamily="2" charset="-78"/>
+                <a:ea typeface="Amiri" pitchFamily="2" charset="-78"/>
                 <a:cs typeface="Amiri" pitchFamily="2" charset="-78"/>
               </a:rPr>
               <a:t>أُقِيمُ عِنْدَ عَائِلَةٍ ______ ، وَعِنْدَهُمْ ______ .</a:t>
@@ -26056,6 +26208,7 @@
                   <a:srgbClr val="1B3B6F"/>
                 </a:solidFill>
                 <a:latin typeface="Amiri" pitchFamily="2" charset="-78"/>
+                <a:ea typeface="Amiri" pitchFamily="2" charset="-78"/>
                 <a:cs typeface="Amiri" pitchFamily="2" charset="-78"/>
               </a:rPr>
               <a:t>فِي الأُسْبُوعِ الأَوَّلِ زُرْتُ ______ وَ______ .</a:t>
@@ -26262,6 +26415,7 @@
                   <a:srgbClr val="1B3B6F"/>
                 </a:solidFill>
                 <a:latin typeface="Amiri" pitchFamily="2" charset="-78"/>
+                <a:ea typeface="Amiri" pitchFamily="2" charset="-78"/>
                 <a:cs typeface="Amiri" pitchFamily="2" charset="-78"/>
               </a:rPr>
               <a:t>لَاحَظْتُ أَنَّ ______ ، لِأَنَّ ______ .</a:t>
@@ -26468,6 +26622,7 @@
                   <a:srgbClr val="1B3B6F"/>
                 </a:solidFill>
                 <a:latin typeface="Amiri" pitchFamily="2" charset="-78"/>
+                <a:ea typeface="Amiri" pitchFamily="2" charset="-78"/>
                 <a:cs typeface="Amiri" pitchFamily="2" charset="-78"/>
               </a:rPr>
               <a:t>أَنَا ______ . سَنُسَافِرُ إِلَى ______ .</a:t>
@@ -26674,6 +26829,7 @@
                   <a:srgbClr val="1B3B6F"/>
                 </a:solidFill>
                 <a:latin typeface="Amiri" pitchFamily="2" charset="-78"/>
+                <a:ea typeface="Amiri" pitchFamily="2" charset="-78"/>
                 <a:cs typeface="Amiri" pitchFamily="2" charset="-78"/>
               </a:rPr>
               <a:t>وَأَنْتِ، ______ ؟ مَعَ السَّلَامَةِ.</a:t>
@@ -26913,13 +27069,9 @@
     <a:fontScheme name="Office">
       <a:majorFont>
         <a:latin typeface="Calibri Light" panose="020F0302020204030204"/>
-        <a:ea typeface=""/>
-        <a:cs typeface=""/>
-        <a:font script="Jpan" typeface="游ゴシック Light"/>
-        <a:font script="Hang" typeface="맑은 고딕"/>
-        <a:font script="Hans" typeface="等线 Light"/>
-        <a:font script="Hant" typeface="新細明體"/>
-        <a:font script="Arab" typeface="Times New Roman"/>
+        <a:ea typeface="Amiri" pitchFamily="2" charset="-78"/>
+        <a:cs typeface="Amiri" pitchFamily="2" charset="-78"/>
+        <a:font script="Arab" typeface="Amiri"/>
         <a:font script="Hebr" typeface="Times New Roman"/>
         <a:font script="Thai" typeface="Angsana New"/>
         <a:font script="Ethi" typeface="Nyala"/>
@@ -26965,13 +27117,9 @@
       </a:majorFont>
       <a:minorFont>
         <a:latin typeface="Calibri" panose="020F0502020204030204"/>
-        <a:ea typeface=""/>
-        <a:cs typeface=""/>
-        <a:font script="Jpan" typeface="游ゴシック"/>
-        <a:font script="Hang" typeface="맑은 고딕"/>
-        <a:font script="Hans" typeface="等线"/>
-        <a:font script="Hant" typeface="新細明體"/>
-        <a:font script="Arab" typeface="Arial"/>
+        <a:ea typeface="Amiri" pitchFamily="2" charset="-78"/>
+        <a:cs typeface="Amiri" pitchFamily="2" charset="-78"/>
+        <a:font script="Arab" typeface="Amiri"/>
         <a:font script="Hebr" typeface="Arial"/>
         <a:font script="Thai" typeface="Cordia New"/>
         <a:font script="Ethi" typeface="Nyala"/>

--- a/Topic_E/Exam_Practice/TE-L08_Writing_Workshop_Travel_Cultural_Exchange_and_Understanding.pptx
+++ b/Topic_E/Exam_Practice/TE-L08_Writing_Workshop_Travel_Cultural_Exchange_and_Understanding.pptx
@@ -3852,7 +3852,7 @@
                 <a:solidFill>
                   <a:srgbClr val="FFFFFF"/>
                 </a:solidFill>
-                <a:latin typeface="Calibri" pitchFamily="34" charset="0"/>
+                <a:latin typeface="Amiri" pitchFamily="2" charset="-78"/>
                 <a:ea typeface="Amiri" pitchFamily="2" charset="-78"/>
                 <a:cs typeface="Amiri" pitchFamily="2" charset="-78"/>
               </a:rPr>
@@ -3918,7 +3918,7 @@
                 <a:solidFill>
                   <a:srgbClr val="FFFFFF"/>
                 </a:solidFill>
-                <a:latin typeface="Calibri" pitchFamily="34" charset="0"/>
+                <a:latin typeface="Amiri" pitchFamily="2" charset="-78"/>
                 <a:ea typeface="Amiri" pitchFamily="2" charset="-78"/>
                 <a:cs typeface="Amiri" pitchFamily="2" charset="-78"/>
               </a:rPr>
@@ -3984,7 +3984,7 @@
                 <a:solidFill>
                   <a:srgbClr val="FFFFFF"/>
                 </a:solidFill>
-                <a:latin typeface="Calibri" pitchFamily="34" charset="0"/>
+                <a:latin typeface="Amiri" pitchFamily="2" charset="-78"/>
                 <a:ea typeface="Amiri" pitchFamily="2" charset="-78"/>
                 <a:cs typeface="Amiri" pitchFamily="2" charset="-78"/>
               </a:rPr>
@@ -4050,7 +4050,7 @@
                 <a:solidFill>
                   <a:srgbClr val="FFFFFF"/>
                 </a:solidFill>
-                <a:latin typeface="Calibri" pitchFamily="34" charset="0"/>
+                <a:latin typeface="Amiri" pitchFamily="2" charset="-78"/>
                 <a:ea typeface="Amiri" pitchFamily="2" charset="-78"/>
                 <a:cs typeface="Amiri" pitchFamily="2" charset="-78"/>
               </a:rPr>
@@ -4848,7 +4848,7 @@
                 <a:solidFill>
                   <a:srgbClr val="FFFFFF"/>
                 </a:solidFill>
-                <a:latin typeface="Calibri" pitchFamily="34" charset="0"/>
+                <a:latin typeface="Amiri" pitchFamily="2" charset="-78"/>
                 <a:ea typeface="Amiri" pitchFamily="2" charset="-78"/>
                 <a:cs typeface="Amiri" pitchFamily="2" charset="-78"/>
               </a:rPr>
@@ -4914,7 +4914,7 @@
                 <a:solidFill>
                   <a:srgbClr val="FFFFFF"/>
                 </a:solidFill>
-                <a:latin typeface="Calibri" pitchFamily="34" charset="0"/>
+                <a:latin typeface="Amiri" pitchFamily="2" charset="-78"/>
                 <a:ea typeface="Amiri" pitchFamily="2" charset="-78"/>
                 <a:cs typeface="Amiri" pitchFamily="2" charset="-78"/>
               </a:rPr>
@@ -4980,7 +4980,7 @@
                 <a:solidFill>
                   <a:srgbClr val="FFFFFF"/>
                 </a:solidFill>
-                <a:latin typeface="Calibri" pitchFamily="34" charset="0"/>
+                <a:latin typeface="Amiri" pitchFamily="2" charset="-78"/>
                 <a:ea typeface="Amiri" pitchFamily="2" charset="-78"/>
                 <a:cs typeface="Amiri" pitchFamily="2" charset="-78"/>
               </a:rPr>
@@ -5046,7 +5046,7 @@
                 <a:solidFill>
                   <a:srgbClr val="FFFFFF"/>
                 </a:solidFill>
-                <a:latin typeface="Calibri" pitchFamily="34" charset="0"/>
+                <a:latin typeface="Amiri" pitchFamily="2" charset="-78"/>
                 <a:ea typeface="Amiri" pitchFamily="2" charset="-78"/>
                 <a:cs typeface="Amiri" pitchFamily="2" charset="-78"/>
               </a:rPr>
@@ -8603,7 +8603,7 @@
                 <a:solidFill>
                   <a:srgbClr val="FFFFFF"/>
                 </a:solidFill>
-                <a:latin typeface="Calibri" pitchFamily="34" charset="0"/>
+                <a:latin typeface="Amiri" pitchFamily="2" charset="-78"/>
                 <a:ea typeface="Amiri" pitchFamily="2" charset="-78"/>
                 <a:cs typeface="Amiri" pitchFamily="2" charset="-78"/>
               </a:rPr>
@@ -8669,7 +8669,7 @@
                 <a:solidFill>
                   <a:srgbClr val="FFFFFF"/>
                 </a:solidFill>
-                <a:latin typeface="Calibri" pitchFamily="34" charset="0"/>
+                <a:latin typeface="Amiri" pitchFamily="2" charset="-78"/>
                 <a:ea typeface="Amiri" pitchFamily="2" charset="-78"/>
                 <a:cs typeface="Amiri" pitchFamily="2" charset="-78"/>
               </a:rPr>
@@ -8735,7 +8735,7 @@
                 <a:solidFill>
                   <a:srgbClr val="FFFFFF"/>
                 </a:solidFill>
-                <a:latin typeface="Calibri" pitchFamily="34" charset="0"/>
+                <a:latin typeface="Amiri" pitchFamily="2" charset="-78"/>
                 <a:ea typeface="Amiri" pitchFamily="2" charset="-78"/>
                 <a:cs typeface="Amiri" pitchFamily="2" charset="-78"/>
               </a:rPr>
@@ -8801,7 +8801,7 @@
                 <a:solidFill>
                   <a:srgbClr val="FFFFFF"/>
                 </a:solidFill>
-                <a:latin typeface="Calibri" pitchFamily="34" charset="0"/>
+                <a:latin typeface="Amiri" pitchFamily="2" charset="-78"/>
                 <a:ea typeface="Amiri" pitchFamily="2" charset="-78"/>
                 <a:cs typeface="Amiri" pitchFamily="2" charset="-78"/>
               </a:rPr>
@@ -9588,7 +9588,7 @@
                 <a:solidFill>
                   <a:srgbClr val="FFFFFF"/>
                 </a:solidFill>
-                <a:latin typeface="Calibri" pitchFamily="34" charset="0"/>
+                <a:latin typeface="Amiri" pitchFamily="2" charset="-78"/>
                 <a:ea typeface="Amiri" pitchFamily="2" charset="-78"/>
                 <a:cs typeface="Amiri" pitchFamily="2" charset="-78"/>
               </a:rPr>
@@ -9654,7 +9654,7 @@
                 <a:solidFill>
                   <a:srgbClr val="FFFFFF"/>
                 </a:solidFill>
-                <a:latin typeface="Calibri" pitchFamily="34" charset="0"/>
+                <a:latin typeface="Amiri" pitchFamily="2" charset="-78"/>
                 <a:ea typeface="Amiri" pitchFamily="2" charset="-78"/>
                 <a:cs typeface="Amiri" pitchFamily="2" charset="-78"/>
               </a:rPr>
@@ -9720,7 +9720,7 @@
                 <a:solidFill>
                   <a:srgbClr val="FFFFFF"/>
                 </a:solidFill>
-                <a:latin typeface="Calibri" pitchFamily="34" charset="0"/>
+                <a:latin typeface="Amiri" pitchFamily="2" charset="-78"/>
                 <a:ea typeface="Amiri" pitchFamily="2" charset="-78"/>
                 <a:cs typeface="Amiri" pitchFamily="2" charset="-78"/>
               </a:rPr>
@@ -9786,7 +9786,7 @@
                 <a:solidFill>
                   <a:srgbClr val="FFFFFF"/>
                 </a:solidFill>
-                <a:latin typeface="Calibri" pitchFamily="34" charset="0"/>
+                <a:latin typeface="Amiri" pitchFamily="2" charset="-78"/>
                 <a:ea typeface="Amiri" pitchFamily="2" charset="-78"/>
                 <a:cs typeface="Amiri" pitchFamily="2" charset="-78"/>
               </a:rPr>
@@ -10573,7 +10573,7 @@
                 <a:solidFill>
                   <a:srgbClr val="FFFFFF"/>
                 </a:solidFill>
-                <a:latin typeface="Calibri" pitchFamily="34" charset="0"/>
+                <a:latin typeface="Amiri" pitchFamily="2" charset="-78"/>
                 <a:ea typeface="Amiri" pitchFamily="2" charset="-78"/>
                 <a:cs typeface="Amiri" pitchFamily="2" charset="-78"/>
               </a:rPr>
@@ -10639,7 +10639,7 @@
                 <a:solidFill>
                   <a:srgbClr val="FFFFFF"/>
                 </a:solidFill>
-                <a:latin typeface="Calibri" pitchFamily="34" charset="0"/>
+                <a:latin typeface="Amiri" pitchFamily="2" charset="-78"/>
                 <a:ea typeface="Amiri" pitchFamily="2" charset="-78"/>
                 <a:cs typeface="Amiri" pitchFamily="2" charset="-78"/>
               </a:rPr>
@@ -10705,7 +10705,7 @@
                 <a:solidFill>
                   <a:srgbClr val="FFFFFF"/>
                 </a:solidFill>
-                <a:latin typeface="Calibri" pitchFamily="34" charset="0"/>
+                <a:latin typeface="Amiri" pitchFamily="2" charset="-78"/>
                 <a:ea typeface="Amiri" pitchFamily="2" charset="-78"/>
                 <a:cs typeface="Amiri" pitchFamily="2" charset="-78"/>
               </a:rPr>
@@ -10771,7 +10771,7 @@
                 <a:solidFill>
                   <a:srgbClr val="FFFFFF"/>
                 </a:solidFill>
-                <a:latin typeface="Calibri" pitchFamily="34" charset="0"/>
+                <a:latin typeface="Amiri" pitchFamily="2" charset="-78"/>
                 <a:ea typeface="Amiri" pitchFamily="2" charset="-78"/>
                 <a:cs typeface="Amiri" pitchFamily="2" charset="-78"/>
               </a:rPr>
